--- a/examples/ppt/transitions/transitions-bands.pptx
+++ b/examples/ppt/transitions/transitions-bands.pptx
@@ -5,27 +5,27 @@
     <p:sldMasterId xmlns:r="http://schemas.openxmlformats.org/officeDocument/2006/relationships" id="2147483648" r:id="rId1"/>
   </p:sldMasterIdLst>
   <p:sldIdLst>
-    <p:sldId id="256" r:id="R58e5761c6e4d49c0"/>
-    <p:sldId id="257" r:id="R591859b2f2d74071"/>
-    <p:sldId id="258" r:id="R10259c8364cb412e"/>
-    <p:sldId id="259" r:id="R598f2b44334d4cea"/>
-    <p:sldId id="260" r:id="R0c0406867feb47cb"/>
-    <p:sldId id="261" r:id="Rf61956136d6d4b2a"/>
-    <p:sldId id="262" r:id="R15d3b4ae3c3840fc"/>
-    <p:sldId id="263" r:id="R64b4e67ea21a432c"/>
-    <p:sldId id="264" r:id="Ra3c5586d5ec84d5d"/>
-    <p:sldId id="265" r:id="R01a0bf7c8b594e98"/>
-    <p:sldId id="266" r:id="R180503dc01fc4a88"/>
-    <p:sldId id="267" r:id="Re2475e4b6b0c405c"/>
-    <p:sldId id="268" r:id="R5645b32f09674739"/>
-    <p:sldId id="269" r:id="R58bc24aaf4f24c08"/>
-    <p:sldId id="270" r:id="R07ad155fbc1d4c2d"/>
-    <p:sldId id="271" r:id="R57fc3975ec9240f1"/>
-    <p:sldId id="272" r:id="R6e578dacaaf74395"/>
-    <p:sldId id="273" r:id="R3b5de98b564c469f"/>
-    <p:sldId id="274" r:id="R9361912af0fc4e73"/>
-    <p:sldId id="275" r:id="Rdfe7eb22b15a4ecd"/>
-    <p:sldId id="276" r:id="Rf0c5a93b0d8247e0"/>
+    <p:sldId id="256" r:id="Ra3aa767bf682420c"/>
+    <p:sldId id="257" r:id="R91732169b2624f08"/>
+    <p:sldId id="258" r:id="R97023f01774f4964"/>
+    <p:sldId id="259" r:id="Ra7828214ac67478a"/>
+    <p:sldId id="260" r:id="R57752f5fbc1746d5"/>
+    <p:sldId id="261" r:id="R2408bed0e85f4764"/>
+    <p:sldId id="262" r:id="Rb28ff44a24c44d3e"/>
+    <p:sldId id="263" r:id="R669a6c602f414616"/>
+    <p:sldId id="264" r:id="R895799d246ef43d5"/>
+    <p:sldId id="265" r:id="Red7d34be598247a1"/>
+    <p:sldId id="266" r:id="R26d9e24af7f74366"/>
+    <p:sldId id="267" r:id="R57adf6a25ab24423"/>
+    <p:sldId id="268" r:id="R238a7db743644998"/>
+    <p:sldId id="269" r:id="R3077c669e66444e0"/>
+    <p:sldId id="270" r:id="R6c2f37cf36ee4fd3"/>
+    <p:sldId id="271" r:id="R01bb251bf34a4dd7"/>
+    <p:sldId id="272" r:id="Rd4d751fe2c144782"/>
+    <p:sldId id="273" r:id="Rc34a6cffd0a64176"/>
+    <p:sldId id="274" r:id="R42f9d05ad14f4625"/>
+    <p:sldId id="275" r:id="R5940339e7e3e4391"/>
+    <p:sldId id="276" r:id="R4f79e61ea28f42bb"/>
   </p:sldIdLst>
   <p:sldSz cx="12192000" cy="6858000"/>
   <p:notesSz cx="6858000" cy="9144000"/>
@@ -300,7 +300,7 @@
 </file>
 
 <file path=ppt/slideMasters/slideMaster1.xml><?xml version="1.0" encoding="utf-8"?>
-<p:sldMaster xmlns:p="http://schemas.openxmlformats.org/presentationml/2006/main">
+<p:sldMaster xmlns:r="http://schemas.openxmlformats.org/officeDocument/2006/relationships" xmlns:p="http://schemas.openxmlformats.org/presentationml/2006/main">
   <p:cSld>
     <p:spTree>
       <p:nvGrpSpPr>
@@ -334,7 +334,7 @@
       <p:grpSpPr/>
       <p:sp>
         <p:nvSpPr>
-          <p:cNvPr id="10000" name="TextBox 1"/>
+          <p:cNvPr id="100000" name="TextBox 1"/>
           <p:cNvSpPr/>
           <p:nvPr/>
         </p:nvSpPr>
@@ -353,17 +353,12 @@
         <p:txBody>
           <a:bodyPr xmlns:a="http://schemas.openxmlformats.org/drawingml/2006/main"/>
           <a:lstStyle xmlns:a="http://schemas.openxmlformats.org/drawingml/2006/main"/>
-          <a:p xmlns:a="http://schemas.openxmlformats.org/drawingml/2006/main">
-            <a:r>
-              <a:rPr lang="en-US"/>
-              <a:t/>
-            </a:r>
-          </a:p>
-        </p:txBody>
-      </p:sp>
-      <p:sp>
-        <p:nvSpPr>
-          <p:cNvPr id="10001" name="TextBox 2"/>
+          <a:p xmlns:a="http://schemas.openxmlformats.org/drawingml/2006/main"/>
+        </p:txBody>
+      </p:sp>
+      <p:sp>
+        <p:nvSpPr>
+          <p:cNvPr id="100001" name="TextBox 2"/>
           <p:cNvSpPr txBox="1"/>
           <p:nvPr/>
         </p:nvSpPr>
@@ -409,7 +404,7 @@
       <p:grpSpPr/>
       <p:sp>
         <p:nvSpPr>
-          <p:cNvPr id="10018" name="TextBox 1"/>
+          <p:cNvPr id="100018" name="TextBox 1"/>
           <p:cNvSpPr/>
           <p:nvPr/>
         </p:nvSpPr>
@@ -428,17 +423,12 @@
         <p:txBody>
           <a:bodyPr xmlns:a="http://schemas.openxmlformats.org/drawingml/2006/main"/>
           <a:lstStyle xmlns:a="http://schemas.openxmlformats.org/drawingml/2006/main"/>
-          <a:p xmlns:a="http://schemas.openxmlformats.org/drawingml/2006/main">
-            <a:r>
-              <a:rPr lang="en-US"/>
-              <a:t/>
-            </a:r>
-          </a:p>
-        </p:txBody>
-      </p:sp>
-      <p:sp>
-        <p:nvSpPr>
-          <p:cNvPr id="10019" name="TextBox 2"/>
+          <a:p xmlns:a="http://schemas.openxmlformats.org/drawingml/2006/main"/>
+        </p:txBody>
+      </p:sp>
+      <p:sp>
+        <p:nvSpPr>
+          <p:cNvPr id="100019" name="TextBox 2"/>
           <p:cNvSpPr txBox="1"/>
           <p:nvPr/>
         </p:nvSpPr>
@@ -487,7 +477,7 @@
       <p:grpSpPr/>
       <p:sp>
         <p:nvSpPr>
-          <p:cNvPr id="10020" name="TextBox 1"/>
+          <p:cNvPr id="100020" name="TextBox 1"/>
           <p:cNvSpPr/>
           <p:nvPr/>
         </p:nvSpPr>
@@ -506,17 +496,12 @@
         <p:txBody>
           <a:bodyPr xmlns:a="http://schemas.openxmlformats.org/drawingml/2006/main"/>
           <a:lstStyle xmlns:a="http://schemas.openxmlformats.org/drawingml/2006/main"/>
-          <a:p xmlns:a="http://schemas.openxmlformats.org/drawingml/2006/main">
-            <a:r>
-              <a:rPr lang="en-US"/>
-              <a:t/>
-            </a:r>
-          </a:p>
-        </p:txBody>
-      </p:sp>
-      <p:sp>
-        <p:nvSpPr>
-          <p:cNvPr id="10021" name="TextBox 2"/>
+          <a:p xmlns:a="http://schemas.openxmlformats.org/drawingml/2006/main"/>
+        </p:txBody>
+      </p:sp>
+      <p:sp>
+        <p:nvSpPr>
+          <p:cNvPr id="100021" name="TextBox 2"/>
           <p:cNvSpPr txBox="1"/>
           <p:nvPr/>
         </p:nvSpPr>
@@ -565,7 +550,7 @@
       <p:grpSpPr/>
       <p:sp>
         <p:nvSpPr>
-          <p:cNvPr id="10022" name="TextBox 1"/>
+          <p:cNvPr id="100022" name="TextBox 1"/>
           <p:cNvSpPr/>
           <p:nvPr/>
         </p:nvSpPr>
@@ -584,17 +569,12 @@
         <p:txBody>
           <a:bodyPr xmlns:a="http://schemas.openxmlformats.org/drawingml/2006/main"/>
           <a:lstStyle xmlns:a="http://schemas.openxmlformats.org/drawingml/2006/main"/>
-          <a:p xmlns:a="http://schemas.openxmlformats.org/drawingml/2006/main">
-            <a:r>
-              <a:rPr lang="en-US"/>
-              <a:t/>
-            </a:r>
-          </a:p>
-        </p:txBody>
-      </p:sp>
-      <p:sp>
-        <p:nvSpPr>
-          <p:cNvPr id="10023" name="TextBox 2"/>
+          <a:p xmlns:a="http://schemas.openxmlformats.org/drawingml/2006/main"/>
+        </p:txBody>
+      </p:sp>
+      <p:sp>
+        <p:nvSpPr>
+          <p:cNvPr id="100023" name="TextBox 2"/>
           <p:cNvSpPr txBox="1"/>
           <p:nvPr/>
         </p:nvSpPr>
@@ -643,7 +623,7 @@
       <p:grpSpPr/>
       <p:sp>
         <p:nvSpPr>
-          <p:cNvPr id="10024" name="TextBox 1"/>
+          <p:cNvPr id="100024" name="TextBox 1"/>
           <p:cNvSpPr/>
           <p:nvPr/>
         </p:nvSpPr>
@@ -662,17 +642,12 @@
         <p:txBody>
           <a:bodyPr xmlns:a="http://schemas.openxmlformats.org/drawingml/2006/main"/>
           <a:lstStyle xmlns:a="http://schemas.openxmlformats.org/drawingml/2006/main"/>
-          <a:p xmlns:a="http://schemas.openxmlformats.org/drawingml/2006/main">
-            <a:r>
-              <a:rPr lang="en-US"/>
-              <a:t/>
-            </a:r>
-          </a:p>
-        </p:txBody>
-      </p:sp>
-      <p:sp>
-        <p:nvSpPr>
-          <p:cNvPr id="10025" name="TextBox 2"/>
+          <a:p xmlns:a="http://schemas.openxmlformats.org/drawingml/2006/main"/>
+        </p:txBody>
+      </p:sp>
+      <p:sp>
+        <p:nvSpPr>
+          <p:cNvPr id="100025" name="TextBox 2"/>
           <p:cNvSpPr txBox="1"/>
           <p:nvPr/>
         </p:nvSpPr>
@@ -721,7 +696,7 @@
       <p:grpSpPr/>
       <p:sp>
         <p:nvSpPr>
-          <p:cNvPr id="10026" name="TextBox 1"/>
+          <p:cNvPr id="100026" name="TextBox 1"/>
           <p:cNvSpPr/>
           <p:nvPr/>
         </p:nvSpPr>
@@ -740,17 +715,12 @@
         <p:txBody>
           <a:bodyPr xmlns:a="http://schemas.openxmlformats.org/drawingml/2006/main"/>
           <a:lstStyle xmlns:a="http://schemas.openxmlformats.org/drawingml/2006/main"/>
-          <a:p xmlns:a="http://schemas.openxmlformats.org/drawingml/2006/main">
-            <a:r>
-              <a:rPr lang="en-US"/>
-              <a:t/>
-            </a:r>
-          </a:p>
-        </p:txBody>
-      </p:sp>
-      <p:sp>
-        <p:nvSpPr>
-          <p:cNvPr id="10027" name="TextBox 2"/>
+          <a:p xmlns:a="http://schemas.openxmlformats.org/drawingml/2006/main"/>
+        </p:txBody>
+      </p:sp>
+      <p:sp>
+        <p:nvSpPr>
+          <p:cNvPr id="100027" name="TextBox 2"/>
           <p:cNvSpPr txBox="1"/>
           <p:nvPr/>
         </p:nvSpPr>
@@ -799,7 +769,7 @@
       <p:grpSpPr/>
       <p:sp>
         <p:nvSpPr>
-          <p:cNvPr id="10028" name="TextBox 1"/>
+          <p:cNvPr id="100028" name="TextBox 1"/>
           <p:cNvSpPr/>
           <p:nvPr/>
         </p:nvSpPr>
@@ -818,17 +788,12 @@
         <p:txBody>
           <a:bodyPr xmlns:a="http://schemas.openxmlformats.org/drawingml/2006/main"/>
           <a:lstStyle xmlns:a="http://schemas.openxmlformats.org/drawingml/2006/main"/>
-          <a:p xmlns:a="http://schemas.openxmlformats.org/drawingml/2006/main">
-            <a:r>
-              <a:rPr lang="en-US"/>
-              <a:t/>
-            </a:r>
-          </a:p>
-        </p:txBody>
-      </p:sp>
-      <p:sp>
-        <p:nvSpPr>
-          <p:cNvPr id="10029" name="TextBox 2"/>
+          <a:p xmlns:a="http://schemas.openxmlformats.org/drawingml/2006/main"/>
+        </p:txBody>
+      </p:sp>
+      <p:sp>
+        <p:nvSpPr>
+          <p:cNvPr id="100029" name="TextBox 2"/>
           <p:cNvSpPr txBox="1"/>
           <p:nvPr/>
         </p:nvSpPr>
@@ -877,7 +842,7 @@
       <p:grpSpPr/>
       <p:sp>
         <p:nvSpPr>
-          <p:cNvPr id="10030" name="TextBox 1"/>
+          <p:cNvPr id="100030" name="TextBox 1"/>
           <p:cNvSpPr/>
           <p:nvPr/>
         </p:nvSpPr>
@@ -896,17 +861,12 @@
         <p:txBody>
           <a:bodyPr xmlns:a="http://schemas.openxmlformats.org/drawingml/2006/main"/>
           <a:lstStyle xmlns:a="http://schemas.openxmlformats.org/drawingml/2006/main"/>
-          <a:p xmlns:a="http://schemas.openxmlformats.org/drawingml/2006/main">
-            <a:r>
-              <a:rPr lang="en-US"/>
-              <a:t/>
-            </a:r>
-          </a:p>
-        </p:txBody>
-      </p:sp>
-      <p:sp>
-        <p:nvSpPr>
-          <p:cNvPr id="10031" name="TextBox 2"/>
+          <a:p xmlns:a="http://schemas.openxmlformats.org/drawingml/2006/main"/>
+        </p:txBody>
+      </p:sp>
+      <p:sp>
+        <p:nvSpPr>
+          <p:cNvPr id="100031" name="TextBox 2"/>
           <p:cNvSpPr txBox="1"/>
           <p:nvPr/>
         </p:nvSpPr>
@@ -955,7 +915,7 @@
       <p:grpSpPr/>
       <p:sp>
         <p:nvSpPr>
-          <p:cNvPr id="10032" name="TextBox 1"/>
+          <p:cNvPr id="100032" name="TextBox 1"/>
           <p:cNvSpPr/>
           <p:nvPr/>
         </p:nvSpPr>
@@ -974,17 +934,12 @@
         <p:txBody>
           <a:bodyPr xmlns:a="http://schemas.openxmlformats.org/drawingml/2006/main"/>
           <a:lstStyle xmlns:a="http://schemas.openxmlformats.org/drawingml/2006/main"/>
-          <a:p xmlns:a="http://schemas.openxmlformats.org/drawingml/2006/main">
-            <a:r>
-              <a:rPr lang="en-US"/>
-              <a:t/>
-            </a:r>
-          </a:p>
-        </p:txBody>
-      </p:sp>
-      <p:sp>
-        <p:nvSpPr>
-          <p:cNvPr id="10033" name="TextBox 2"/>
+          <a:p xmlns:a="http://schemas.openxmlformats.org/drawingml/2006/main"/>
+        </p:txBody>
+      </p:sp>
+      <p:sp>
+        <p:nvSpPr>
+          <p:cNvPr id="100033" name="TextBox 2"/>
           <p:cNvSpPr txBox="1"/>
           <p:nvPr/>
         </p:nvSpPr>
@@ -1033,7 +988,7 @@
       <p:grpSpPr/>
       <p:sp>
         <p:nvSpPr>
-          <p:cNvPr id="10034" name="TextBox 1"/>
+          <p:cNvPr id="100034" name="TextBox 1"/>
           <p:cNvSpPr/>
           <p:nvPr/>
         </p:nvSpPr>
@@ -1052,17 +1007,12 @@
         <p:txBody>
           <a:bodyPr xmlns:a="http://schemas.openxmlformats.org/drawingml/2006/main"/>
           <a:lstStyle xmlns:a="http://schemas.openxmlformats.org/drawingml/2006/main"/>
-          <a:p xmlns:a="http://schemas.openxmlformats.org/drawingml/2006/main">
-            <a:r>
-              <a:rPr lang="en-US"/>
-              <a:t/>
-            </a:r>
-          </a:p>
-        </p:txBody>
-      </p:sp>
-      <p:sp>
-        <p:nvSpPr>
-          <p:cNvPr id="10035" name="TextBox 2"/>
+          <a:p xmlns:a="http://schemas.openxmlformats.org/drawingml/2006/main"/>
+        </p:txBody>
+      </p:sp>
+      <p:sp>
+        <p:nvSpPr>
+          <p:cNvPr id="100035" name="TextBox 2"/>
           <p:cNvSpPr txBox="1"/>
           <p:nvPr/>
         </p:nvSpPr>
@@ -1111,7 +1061,7 @@
       <p:grpSpPr/>
       <p:sp>
         <p:nvSpPr>
-          <p:cNvPr id="10036" name="TextBox 1"/>
+          <p:cNvPr id="100036" name="TextBox 1"/>
           <p:cNvSpPr/>
           <p:nvPr/>
         </p:nvSpPr>
@@ -1130,17 +1080,12 @@
         <p:txBody>
           <a:bodyPr xmlns:a="http://schemas.openxmlformats.org/drawingml/2006/main"/>
           <a:lstStyle xmlns:a="http://schemas.openxmlformats.org/drawingml/2006/main"/>
-          <a:p xmlns:a="http://schemas.openxmlformats.org/drawingml/2006/main">
-            <a:r>
-              <a:rPr lang="en-US"/>
-              <a:t/>
-            </a:r>
-          </a:p>
-        </p:txBody>
-      </p:sp>
-      <p:sp>
-        <p:nvSpPr>
-          <p:cNvPr id="10037" name="TextBox 2"/>
+          <a:p xmlns:a="http://schemas.openxmlformats.org/drawingml/2006/main"/>
+        </p:txBody>
+      </p:sp>
+      <p:sp>
+        <p:nvSpPr>
+          <p:cNvPr id="100037" name="TextBox 2"/>
           <p:cNvSpPr txBox="1"/>
           <p:nvPr/>
         </p:nvSpPr>
@@ -1189,7 +1134,7 @@
       <p:grpSpPr/>
       <p:sp>
         <p:nvSpPr>
-          <p:cNvPr id="10002" name="TextBox 1"/>
+          <p:cNvPr id="100002" name="TextBox 1"/>
           <p:cNvSpPr/>
           <p:nvPr/>
         </p:nvSpPr>
@@ -1208,17 +1153,12 @@
         <p:txBody>
           <a:bodyPr xmlns:a="http://schemas.openxmlformats.org/drawingml/2006/main"/>
           <a:lstStyle xmlns:a="http://schemas.openxmlformats.org/drawingml/2006/main"/>
-          <a:p xmlns:a="http://schemas.openxmlformats.org/drawingml/2006/main">
-            <a:r>
-              <a:rPr lang="en-US"/>
-              <a:t/>
-            </a:r>
-          </a:p>
-        </p:txBody>
-      </p:sp>
-      <p:sp>
-        <p:nvSpPr>
-          <p:cNvPr id="10003" name="TextBox 2"/>
+          <a:p xmlns:a="http://schemas.openxmlformats.org/drawingml/2006/main"/>
+        </p:txBody>
+      </p:sp>
+      <p:sp>
+        <p:nvSpPr>
+          <p:cNvPr id="100003" name="TextBox 2"/>
           <p:cNvSpPr txBox="1"/>
           <p:nvPr/>
         </p:nvSpPr>
@@ -1267,7 +1207,7 @@
       <p:grpSpPr/>
       <p:sp>
         <p:nvSpPr>
-          <p:cNvPr id="10038" name="TextBox 1"/>
+          <p:cNvPr id="100038" name="TextBox 1"/>
           <p:cNvSpPr/>
           <p:nvPr/>
         </p:nvSpPr>
@@ -1286,17 +1226,12 @@
         <p:txBody>
           <a:bodyPr xmlns:a="http://schemas.openxmlformats.org/drawingml/2006/main"/>
           <a:lstStyle xmlns:a="http://schemas.openxmlformats.org/drawingml/2006/main"/>
-          <a:p xmlns:a="http://schemas.openxmlformats.org/drawingml/2006/main">
-            <a:r>
-              <a:rPr lang="en-US"/>
-              <a:t/>
-            </a:r>
-          </a:p>
-        </p:txBody>
-      </p:sp>
-      <p:sp>
-        <p:nvSpPr>
-          <p:cNvPr id="10039" name="TextBox 2"/>
+          <a:p xmlns:a="http://schemas.openxmlformats.org/drawingml/2006/main"/>
+        </p:txBody>
+      </p:sp>
+      <p:sp>
+        <p:nvSpPr>
+          <p:cNvPr id="100039" name="TextBox 2"/>
           <p:cNvSpPr txBox="1"/>
           <p:nvPr/>
         </p:nvSpPr>
@@ -1345,7 +1280,7 @@
       <p:grpSpPr/>
       <p:sp>
         <p:nvSpPr>
-          <p:cNvPr id="10040" name="TextBox 1"/>
+          <p:cNvPr id="100040" name="TextBox 1"/>
           <p:cNvSpPr/>
           <p:nvPr/>
         </p:nvSpPr>
@@ -1364,17 +1299,12 @@
         <p:txBody>
           <a:bodyPr xmlns:a="http://schemas.openxmlformats.org/drawingml/2006/main"/>
           <a:lstStyle xmlns:a="http://schemas.openxmlformats.org/drawingml/2006/main"/>
-          <a:p xmlns:a="http://schemas.openxmlformats.org/drawingml/2006/main">
-            <a:r>
-              <a:rPr lang="en-US"/>
-              <a:t/>
-            </a:r>
-          </a:p>
-        </p:txBody>
-      </p:sp>
-      <p:sp>
-        <p:nvSpPr>
-          <p:cNvPr id="10041" name="TextBox 2"/>
+          <a:p xmlns:a="http://schemas.openxmlformats.org/drawingml/2006/main"/>
+        </p:txBody>
+      </p:sp>
+      <p:sp>
+        <p:nvSpPr>
+          <p:cNvPr id="100041" name="TextBox 2"/>
           <p:cNvSpPr txBox="1"/>
           <p:nvPr/>
         </p:nvSpPr>
@@ -1423,7 +1353,7 @@
       <p:grpSpPr/>
       <p:sp>
         <p:nvSpPr>
-          <p:cNvPr id="10004" name="TextBox 1"/>
+          <p:cNvPr id="100004" name="TextBox 1"/>
           <p:cNvSpPr/>
           <p:nvPr/>
         </p:nvSpPr>
@@ -1442,17 +1372,12 @@
         <p:txBody>
           <a:bodyPr xmlns:a="http://schemas.openxmlformats.org/drawingml/2006/main"/>
           <a:lstStyle xmlns:a="http://schemas.openxmlformats.org/drawingml/2006/main"/>
-          <a:p xmlns:a="http://schemas.openxmlformats.org/drawingml/2006/main">
-            <a:r>
-              <a:rPr lang="en-US"/>
-              <a:t/>
-            </a:r>
-          </a:p>
-        </p:txBody>
-      </p:sp>
-      <p:sp>
-        <p:nvSpPr>
-          <p:cNvPr id="10005" name="TextBox 2"/>
+          <a:p xmlns:a="http://schemas.openxmlformats.org/drawingml/2006/main"/>
+        </p:txBody>
+      </p:sp>
+      <p:sp>
+        <p:nvSpPr>
+          <p:cNvPr id="100005" name="TextBox 2"/>
           <p:cNvSpPr txBox="1"/>
           <p:nvPr/>
         </p:nvSpPr>
@@ -1501,7 +1426,7 @@
       <p:grpSpPr/>
       <p:sp>
         <p:nvSpPr>
-          <p:cNvPr id="10006" name="TextBox 1"/>
+          <p:cNvPr id="100006" name="TextBox 1"/>
           <p:cNvSpPr/>
           <p:nvPr/>
         </p:nvSpPr>
@@ -1520,17 +1445,12 @@
         <p:txBody>
           <a:bodyPr xmlns:a="http://schemas.openxmlformats.org/drawingml/2006/main"/>
           <a:lstStyle xmlns:a="http://schemas.openxmlformats.org/drawingml/2006/main"/>
-          <a:p xmlns:a="http://schemas.openxmlformats.org/drawingml/2006/main">
-            <a:r>
-              <a:rPr lang="en-US"/>
-              <a:t/>
-            </a:r>
-          </a:p>
-        </p:txBody>
-      </p:sp>
-      <p:sp>
-        <p:nvSpPr>
-          <p:cNvPr id="10007" name="TextBox 2"/>
+          <a:p xmlns:a="http://schemas.openxmlformats.org/drawingml/2006/main"/>
+        </p:txBody>
+      </p:sp>
+      <p:sp>
+        <p:nvSpPr>
+          <p:cNvPr id="100007" name="TextBox 2"/>
           <p:cNvSpPr txBox="1"/>
           <p:nvPr/>
         </p:nvSpPr>
@@ -1579,7 +1499,7 @@
       <p:grpSpPr/>
       <p:sp>
         <p:nvSpPr>
-          <p:cNvPr id="10008" name="TextBox 1"/>
+          <p:cNvPr id="100008" name="TextBox 1"/>
           <p:cNvSpPr/>
           <p:nvPr/>
         </p:nvSpPr>
@@ -1598,17 +1518,12 @@
         <p:txBody>
           <a:bodyPr xmlns:a="http://schemas.openxmlformats.org/drawingml/2006/main"/>
           <a:lstStyle xmlns:a="http://schemas.openxmlformats.org/drawingml/2006/main"/>
-          <a:p xmlns:a="http://schemas.openxmlformats.org/drawingml/2006/main">
-            <a:r>
-              <a:rPr lang="en-US"/>
-              <a:t/>
-            </a:r>
-          </a:p>
-        </p:txBody>
-      </p:sp>
-      <p:sp>
-        <p:nvSpPr>
-          <p:cNvPr id="10009" name="TextBox 2"/>
+          <a:p xmlns:a="http://schemas.openxmlformats.org/drawingml/2006/main"/>
+        </p:txBody>
+      </p:sp>
+      <p:sp>
+        <p:nvSpPr>
+          <p:cNvPr id="100009" name="TextBox 2"/>
           <p:cNvSpPr txBox="1"/>
           <p:nvPr/>
         </p:nvSpPr>
@@ -1657,7 +1572,7 @@
       <p:grpSpPr/>
       <p:sp>
         <p:nvSpPr>
-          <p:cNvPr id="10010" name="TextBox 1"/>
+          <p:cNvPr id="100010" name="TextBox 1"/>
           <p:cNvSpPr/>
           <p:nvPr/>
         </p:nvSpPr>
@@ -1676,17 +1591,12 @@
         <p:txBody>
           <a:bodyPr xmlns:a="http://schemas.openxmlformats.org/drawingml/2006/main"/>
           <a:lstStyle xmlns:a="http://schemas.openxmlformats.org/drawingml/2006/main"/>
-          <a:p xmlns:a="http://schemas.openxmlformats.org/drawingml/2006/main">
-            <a:r>
-              <a:rPr lang="en-US"/>
-              <a:t/>
-            </a:r>
-          </a:p>
-        </p:txBody>
-      </p:sp>
-      <p:sp>
-        <p:nvSpPr>
-          <p:cNvPr id="10011" name="TextBox 2"/>
+          <a:p xmlns:a="http://schemas.openxmlformats.org/drawingml/2006/main"/>
+        </p:txBody>
+      </p:sp>
+      <p:sp>
+        <p:nvSpPr>
+          <p:cNvPr id="100011" name="TextBox 2"/>
           <p:cNvSpPr txBox="1"/>
           <p:nvPr/>
         </p:nvSpPr>
@@ -1735,7 +1645,7 @@
       <p:grpSpPr/>
       <p:sp>
         <p:nvSpPr>
-          <p:cNvPr id="10012" name="TextBox 1"/>
+          <p:cNvPr id="100012" name="TextBox 1"/>
           <p:cNvSpPr/>
           <p:nvPr/>
         </p:nvSpPr>
@@ -1754,17 +1664,12 @@
         <p:txBody>
           <a:bodyPr xmlns:a="http://schemas.openxmlformats.org/drawingml/2006/main"/>
           <a:lstStyle xmlns:a="http://schemas.openxmlformats.org/drawingml/2006/main"/>
-          <a:p xmlns:a="http://schemas.openxmlformats.org/drawingml/2006/main">
-            <a:r>
-              <a:rPr lang="en-US"/>
-              <a:t/>
-            </a:r>
-          </a:p>
-        </p:txBody>
-      </p:sp>
-      <p:sp>
-        <p:nvSpPr>
-          <p:cNvPr id="10013" name="TextBox 2"/>
+          <a:p xmlns:a="http://schemas.openxmlformats.org/drawingml/2006/main"/>
+        </p:txBody>
+      </p:sp>
+      <p:sp>
+        <p:nvSpPr>
+          <p:cNvPr id="100013" name="TextBox 2"/>
           <p:cNvSpPr txBox="1"/>
           <p:nvPr/>
         </p:nvSpPr>
@@ -1813,7 +1718,7 @@
       <p:grpSpPr/>
       <p:sp>
         <p:nvSpPr>
-          <p:cNvPr id="10014" name="TextBox 1"/>
+          <p:cNvPr id="100014" name="TextBox 1"/>
           <p:cNvSpPr/>
           <p:nvPr/>
         </p:nvSpPr>
@@ -1832,17 +1737,12 @@
         <p:txBody>
           <a:bodyPr xmlns:a="http://schemas.openxmlformats.org/drawingml/2006/main"/>
           <a:lstStyle xmlns:a="http://schemas.openxmlformats.org/drawingml/2006/main"/>
-          <a:p xmlns:a="http://schemas.openxmlformats.org/drawingml/2006/main">
-            <a:r>
-              <a:rPr lang="en-US"/>
-              <a:t/>
-            </a:r>
-          </a:p>
-        </p:txBody>
-      </p:sp>
-      <p:sp>
-        <p:nvSpPr>
-          <p:cNvPr id="10015" name="TextBox 2"/>
+          <a:p xmlns:a="http://schemas.openxmlformats.org/drawingml/2006/main"/>
+        </p:txBody>
+      </p:sp>
+      <p:sp>
+        <p:nvSpPr>
+          <p:cNvPr id="100015" name="TextBox 2"/>
           <p:cNvSpPr txBox="1"/>
           <p:nvPr/>
         </p:nvSpPr>
@@ -1891,7 +1791,7 @@
       <p:grpSpPr/>
       <p:sp>
         <p:nvSpPr>
-          <p:cNvPr id="10016" name="TextBox 1"/>
+          <p:cNvPr id="100016" name="TextBox 1"/>
           <p:cNvSpPr/>
           <p:nvPr/>
         </p:nvSpPr>
@@ -1910,17 +1810,12 @@
         <p:txBody>
           <a:bodyPr xmlns:a="http://schemas.openxmlformats.org/drawingml/2006/main"/>
           <a:lstStyle xmlns:a="http://schemas.openxmlformats.org/drawingml/2006/main"/>
-          <a:p xmlns:a="http://schemas.openxmlformats.org/drawingml/2006/main">
-            <a:r>
-              <a:rPr lang="en-US"/>
-              <a:t/>
-            </a:r>
-          </a:p>
-        </p:txBody>
-      </p:sp>
-      <p:sp>
-        <p:nvSpPr>
-          <p:cNvPr id="10017" name="TextBox 2"/>
+          <a:p xmlns:a="http://schemas.openxmlformats.org/drawingml/2006/main"/>
+        </p:txBody>
+      </p:sp>
+      <p:sp>
+        <p:nvSpPr>
+          <p:cNvPr id="100017" name="TextBox 2"/>
           <p:cNvSpPr txBox="1"/>
           <p:nvPr/>
         </p:nvSpPr>
